--- a/lect/CH-06-Content.pptx
+++ b/lect/CH-06-Content.pptx
@@ -5137,8 +5137,8 @@
         </p:blipFill>
         <p:spPr>
           <a:xfrm>
-            <a:off x="3150024" y="2992120"/>
-            <a:ext cx="5891645" cy="3840480"/>
+            <a:off x="3570856" y="2992120"/>
+            <a:ext cx="5049981" cy="3291840"/>
           </a:xfrm>
           <a:prstGeom prst="rect">
             <a:avLst/>
@@ -5397,8 +5397,8 @@
         </p:blipFill>
         <p:spPr>
           <a:xfrm>
-            <a:off x="4271769" y="2992120"/>
-            <a:ext cx="3648155" cy="3840480"/>
+            <a:off x="4532352" y="2992120"/>
+            <a:ext cx="3126990" cy="3291840"/>
           </a:xfrm>
           <a:prstGeom prst="rect">
             <a:avLst/>
@@ -6596,8 +6596,8 @@
         </p:blipFill>
         <p:spPr>
           <a:xfrm>
-            <a:off x="3150024" y="3139440"/>
-            <a:ext cx="5891645" cy="3840480"/>
+            <a:off x="3570856" y="3139440"/>
+            <a:ext cx="5049981" cy="3291840"/>
           </a:xfrm>
           <a:prstGeom prst="rect">
             <a:avLst/>
@@ -9557,8 +9557,8 @@
         </p:blipFill>
         <p:spPr>
           <a:xfrm>
-            <a:off x="3150024" y="4414520"/>
-            <a:ext cx="5891645" cy="3840480"/>
+            <a:off x="3570856" y="4414520"/>
+            <a:ext cx="5049981" cy="3291840"/>
           </a:xfrm>
           <a:prstGeom prst="rect">
             <a:avLst/>
